--- a/заняття_3/презентація/statistics_fundamentals.pptx
+++ b/заняття_3/презентація/statistics_fundamentals.pptx
@@ -11091,7 +11091,29 @@
                 <a:ea typeface="Calibri" pitchFamily="34" charset="-122"/>
                 <a:cs typeface="Calibri" pitchFamily="34" charset="-120"/>
               </a:rPr>
-              <a:t>Як кількома статистиками описати колонку і не зробити хибний висновок?</a:t>
+              <a:t>Як кількома </a:t>
+            </a:r>
+            <a:r>
+              <a:rPr lang="uk-UA" sz="1250" dirty="0">
+                <a:solidFill>
+                  <a:srgbClr val="E0E8FF"/>
+                </a:solidFill>
+                <a:latin typeface="Calibri" pitchFamily="34" charset="0"/>
+                <a:ea typeface="Calibri" pitchFamily="34" charset="-122"/>
+                <a:cs typeface="Calibri" pitchFamily="34" charset="-120"/>
+              </a:rPr>
+              <a:t>способами</a:t>
+            </a:r>
+            <a:r>
+              <a:rPr lang="en-US" sz="1250" dirty="0">
+                <a:solidFill>
+                  <a:srgbClr val="E0E8FF"/>
+                </a:solidFill>
+                <a:latin typeface="Calibri" pitchFamily="34" charset="0"/>
+                <a:ea typeface="Calibri" pitchFamily="34" charset="-122"/>
+                <a:cs typeface="Calibri" pitchFamily="34" charset="-120"/>
+              </a:rPr>
+              <a:t> описати колонку і не зробити хибний висновок?</a:t>
             </a:r>
             <a:endParaRPr lang="en-US" sz="1250" dirty="0"/>
           </a:p>
